--- a/Backend/services/pptx-generator-service/slides/global/consideracoes_gerais.pptx
+++ b/Backend/services/pptx-generator-service/slides/global/consideracoes_gerais.pptx
@@ -118,8 +118,7 @@
 <file path=ppt/revisionInfo.xml><?xml version="1.0" encoding="utf-8"?>
 <p1510:revInfo xmlns:a="http://schemas.openxmlformats.org/drawingml/2006/main" xmlns:r="http://schemas.openxmlformats.org/officeDocument/2006/relationships" xmlns:p1510="http://schemas.microsoft.com/office/powerpoint/2015/10/main">
   <p1510:revLst>
-    <p1510:client id="{423B9A96-E10D-0D75-75EE-444517B64839}" v="44" dt="2026-05-18T17:52:29.156"/>
-    <p1510:client id="{500DB933-E33D-C64E-46A5-AA127D80DE03}" v="425" dt="2026-05-18T18:24:31.051"/>
+    <p1510:client id="{725A4A8D-82D2-F1BA-4A07-043A869DD51C}" v="45" dt="2026-05-26T19:22:40.658"/>
   </p1510:revLst>
 </p1510:revInfo>
 </file>
@@ -205,7 +204,7 @@
           </a:lstStyle>
           <a:p>
             <a:fld id="{BFC32E84-E70D-451F-96C2-9AF65BF910CD}" type="datetimeFigureOut">
-              <a:t>18/05/2026</a:t>
+              <a:t>26/05/2026</a:t>
             </a:fld>
             <a:endParaRPr lang="pt-BR"/>
           </a:p>
@@ -639,7 +638,7 @@
                 <a:tabLst/>
                 <a:defRPr/>
               </a:pPr>
-              <a:t>2</a:t>
+              <a:t>1</a:t>
             </a:fld>
             <a:endParaRPr kumimoji="0" lang="pt-BR" sz="1200" b="0" i="0" u="none" strike="noStrike" kern="1200" cap="none" spc="0" normalizeH="0" baseline="0" noProof="0">
               <a:ln>
@@ -802,7 +801,7 @@
           <a:p>
             <a:fld id="{F0E51C7C-CEA3-4CAA-BE4B-344879E7C377}" type="datetimeFigureOut">
               <a:rPr lang="de-DE" smtClean="0"/>
-              <a:t>18.05.2026</a:t>
+              <a:t>26.05.2026</a:t>
             </a:fld>
             <a:endParaRPr lang="de-DE"/>
           </a:p>
@@ -972,7 +971,7 @@
           <a:p>
             <a:fld id="{F0E51C7C-CEA3-4CAA-BE4B-344879E7C377}" type="datetimeFigureOut">
               <a:rPr lang="de-DE" smtClean="0"/>
-              <a:t>18.05.2026</a:t>
+              <a:t>26.05.2026</a:t>
             </a:fld>
             <a:endParaRPr lang="de-DE"/>
           </a:p>
@@ -1152,7 +1151,7 @@
           <a:p>
             <a:fld id="{F0E51C7C-CEA3-4CAA-BE4B-344879E7C377}" type="datetimeFigureOut">
               <a:rPr lang="de-DE" smtClean="0"/>
-              <a:t>18.05.2026</a:t>
+              <a:t>26.05.2026</a:t>
             </a:fld>
             <a:endParaRPr lang="de-DE"/>
           </a:p>
@@ -1322,7 +1321,7 @@
           <a:p>
             <a:fld id="{F0E51C7C-CEA3-4CAA-BE4B-344879E7C377}" type="datetimeFigureOut">
               <a:rPr lang="de-DE" smtClean="0"/>
-              <a:t>18.05.2026</a:t>
+              <a:t>26.05.2026</a:t>
             </a:fld>
             <a:endParaRPr lang="de-DE"/>
           </a:p>
@@ -1568,7 +1567,7 @@
           <a:p>
             <a:fld id="{F0E51C7C-CEA3-4CAA-BE4B-344879E7C377}" type="datetimeFigureOut">
               <a:rPr lang="de-DE" smtClean="0"/>
-              <a:t>18.05.2026</a:t>
+              <a:t>26.05.2026</a:t>
             </a:fld>
             <a:endParaRPr lang="de-DE"/>
           </a:p>
@@ -1800,7 +1799,7 @@
           <a:p>
             <a:fld id="{F0E51C7C-CEA3-4CAA-BE4B-344879E7C377}" type="datetimeFigureOut">
               <a:rPr lang="de-DE" smtClean="0"/>
-              <a:t>18.05.2026</a:t>
+              <a:t>26.05.2026</a:t>
             </a:fld>
             <a:endParaRPr lang="de-DE"/>
           </a:p>
@@ -2167,7 +2166,7 @@
           <a:p>
             <a:fld id="{F0E51C7C-CEA3-4CAA-BE4B-344879E7C377}" type="datetimeFigureOut">
               <a:rPr lang="de-DE" smtClean="0"/>
-              <a:t>18.05.2026</a:t>
+              <a:t>26.05.2026</a:t>
             </a:fld>
             <a:endParaRPr lang="de-DE"/>
           </a:p>
@@ -2285,7 +2284,7 @@
           <a:p>
             <a:fld id="{F0E51C7C-CEA3-4CAA-BE4B-344879E7C377}" type="datetimeFigureOut">
               <a:rPr lang="de-DE" smtClean="0"/>
-              <a:t>18.05.2026</a:t>
+              <a:t>26.05.2026</a:t>
             </a:fld>
             <a:endParaRPr lang="de-DE"/>
           </a:p>
@@ -2380,7 +2379,7 @@
           <a:p>
             <a:fld id="{F0E51C7C-CEA3-4CAA-BE4B-344879E7C377}" type="datetimeFigureOut">
               <a:rPr lang="de-DE" smtClean="0"/>
-              <a:t>18.05.2026</a:t>
+              <a:t>26.05.2026</a:t>
             </a:fld>
             <a:endParaRPr lang="de-DE"/>
           </a:p>
@@ -2657,7 +2656,7 @@
           <a:p>
             <a:fld id="{F0E51C7C-CEA3-4CAA-BE4B-344879E7C377}" type="datetimeFigureOut">
               <a:rPr lang="de-DE" smtClean="0"/>
-              <a:t>18.05.2026</a:t>
+              <a:t>26.05.2026</a:t>
             </a:fld>
             <a:endParaRPr lang="de-DE"/>
           </a:p>
@@ -2910,7 +2909,7 @@
           <a:p>
             <a:fld id="{F0E51C7C-CEA3-4CAA-BE4B-344879E7C377}" type="datetimeFigureOut">
               <a:rPr lang="de-DE" smtClean="0"/>
-              <a:t>18.05.2026</a:t>
+              <a:t>26.05.2026</a:t>
             </a:fld>
             <a:endParaRPr lang="de-DE"/>
           </a:p>
@@ -3123,7 +3122,7 @@
           <a:p>
             <a:fld id="{F0E51C7C-CEA3-4CAA-BE4B-344879E7C377}" type="datetimeFigureOut">
               <a:rPr lang="de-DE" smtClean="0"/>
-              <a:t>18.05.2026</a:t>
+              <a:t>26.05.2026</a:t>
             </a:fld>
             <a:endParaRPr lang="de-DE"/>
           </a:p>
@@ -3974,7 +3973,7 @@
           <a:noFill/>
         </p:spPr>
         <p:txBody>
-          <a:bodyPr wrap="square" rtlCol="0">
+          <a:bodyPr wrap="square" lIns="91440" tIns="45720" rIns="91440" bIns="45720" rtlCol="0" anchor="t">
             <a:spAutoFit/>
           </a:bodyPr>
           <a:lstStyle/>
@@ -4006,11 +4005,18 @@
                 <a:solidFill>
                   <a:schemeClr val="bg1"/>
                 </a:solidFill>
-                <a:latin typeface="Poppins" pitchFamily="2" charset="77"/>
-                <a:cs typeface="Poppins" pitchFamily="2" charset="77"/>
+                <a:latin typeface="Poppins"/>
+                <a:cs typeface="Poppins"/>
               </a:rPr>
-              <a:t>P </a:t>
-            </a:r>
+              <a:t>{{np}}</a:t>
+            </a:r>
+            <a:endParaRPr lang="pt-BR" sz="1400" b="1" dirty="0">
+              <a:solidFill>
+                <a:schemeClr val="bg1"/>
+              </a:solidFill>
+              <a:latin typeface="Poppins"/>
+              <a:cs typeface="Poppins"/>
+            </a:endParaRPr>
           </a:p>
         </p:txBody>
       </p:sp>
@@ -4067,7 +4073,7 @@
           <a:noFill/>
         </p:spPr>
         <p:txBody>
-          <a:bodyPr wrap="square" rtlCol="0">
+          <a:bodyPr wrap="square" lIns="91440" tIns="45720" rIns="91440" bIns="45720" rtlCol="0" anchor="t">
             <a:spAutoFit/>
           </a:bodyPr>
           <a:lstStyle/>
@@ -4095,54 +4101,14 @@
               </a:lnSpc>
             </a:pPr>
             <a:r>
-              <a:rPr lang="pt-BR" sz="1400" b="1" dirty="0" err="1">
+              <a:rPr lang="pt-BR" sz="1400" b="1">
                 <a:solidFill>
                   <a:schemeClr val="bg1"/>
                 </a:solidFill>
-                <a:latin typeface="Poppins" pitchFamily="2" charset="77"/>
-                <a:cs typeface="Poppins" pitchFamily="2" charset="77"/>
+                <a:latin typeface="Poppins"/>
+                <a:cs typeface="Poppins"/>
               </a:rPr>
-              <a:t>xx</a:t>
-            </a:r>
-            <a:r>
-              <a:rPr lang="pt-BR" sz="1400" b="1" dirty="0">
-                <a:solidFill>
-                  <a:schemeClr val="bg1"/>
-                </a:solidFill>
-                <a:latin typeface="Poppins" pitchFamily="2" charset="77"/>
-                <a:cs typeface="Poppins" pitchFamily="2" charset="77"/>
-              </a:rPr>
-              <a:t>/</a:t>
-            </a:r>
-            <a:r>
-              <a:rPr lang="pt-BR" sz="1400" b="1" dirty="0" err="1">
-                <a:solidFill>
-                  <a:schemeClr val="bg1"/>
-                </a:solidFill>
-                <a:latin typeface="Poppins" pitchFamily="2" charset="77"/>
-                <a:cs typeface="Poppins" pitchFamily="2" charset="77"/>
-              </a:rPr>
-              <a:t>xx</a:t>
-            </a:r>
-            <a:r>
-              <a:rPr lang="pt-BR" sz="1400" b="1" dirty="0">
-                <a:solidFill>
-                  <a:schemeClr val="bg1"/>
-                </a:solidFill>
-                <a:latin typeface="Poppins" pitchFamily="2" charset="77"/>
-                <a:cs typeface="Poppins" pitchFamily="2" charset="77"/>
-              </a:rPr>
-              <a:t>/</a:t>
-            </a:r>
-            <a:r>
-              <a:rPr lang="pt-BR" sz="1400" b="1" dirty="0" err="1">
-                <a:solidFill>
-                  <a:schemeClr val="bg1"/>
-                </a:solidFill>
-                <a:latin typeface="Poppins" pitchFamily="2" charset="77"/>
-                <a:cs typeface="Poppins" pitchFamily="2" charset="77"/>
-              </a:rPr>
-              <a:t>xx</a:t>
+              <a:t>{{ds}}</a:t>
             </a:r>
             <a:endParaRPr lang="pt-BR" sz="1400" b="1" dirty="0">
               <a:solidFill>
@@ -4177,7 +4143,7 @@
           <a:noFill/>
         </p:spPr>
         <p:txBody>
-          <a:bodyPr wrap="square" rtlCol="0">
+          <a:bodyPr wrap="square" lIns="91440" tIns="45720" rIns="91440" bIns="45720" rtlCol="0" anchor="t">
             <a:spAutoFit/>
           </a:bodyPr>
           <a:lstStyle/>
@@ -4205,54 +4171,14 @@
               </a:lnSpc>
             </a:pPr>
             <a:r>
-              <a:rPr lang="pt-BR" sz="1400" b="1" dirty="0" err="1">
+              <a:rPr lang="pt-BR" sz="1400" b="1">
                 <a:solidFill>
                   <a:schemeClr val="bg1"/>
                 </a:solidFill>
-                <a:latin typeface="Poppins" pitchFamily="2" charset="77"/>
-                <a:cs typeface="Poppins" pitchFamily="2" charset="77"/>
+                <a:latin typeface="Poppins"/>
+                <a:cs typeface="Poppins"/>
               </a:rPr>
-              <a:t>xx</a:t>
-            </a:r>
-            <a:r>
-              <a:rPr lang="pt-BR" sz="1400" b="1" dirty="0">
-                <a:solidFill>
-                  <a:schemeClr val="bg1"/>
-                </a:solidFill>
-                <a:latin typeface="Poppins" pitchFamily="2" charset="77"/>
-                <a:cs typeface="Poppins" pitchFamily="2" charset="77"/>
-              </a:rPr>
-              <a:t>/</a:t>
-            </a:r>
-            <a:r>
-              <a:rPr lang="pt-BR" sz="1400" b="1" dirty="0" err="1">
-                <a:solidFill>
-                  <a:schemeClr val="bg1"/>
-                </a:solidFill>
-                <a:latin typeface="Poppins" pitchFamily="2" charset="77"/>
-                <a:cs typeface="Poppins" pitchFamily="2" charset="77"/>
-              </a:rPr>
-              <a:t>xx</a:t>
-            </a:r>
-            <a:r>
-              <a:rPr lang="pt-BR" sz="1400" b="1" dirty="0">
-                <a:solidFill>
-                  <a:schemeClr val="bg1"/>
-                </a:solidFill>
-                <a:latin typeface="Poppins" pitchFamily="2" charset="77"/>
-                <a:cs typeface="Poppins" pitchFamily="2" charset="77"/>
-              </a:rPr>
-              <a:t>/</a:t>
-            </a:r>
-            <a:r>
-              <a:rPr lang="pt-BR" sz="1400" b="1" dirty="0" err="1">
-                <a:solidFill>
-                  <a:schemeClr val="bg1"/>
-                </a:solidFill>
-                <a:latin typeface="Poppins" pitchFamily="2" charset="77"/>
-                <a:cs typeface="Poppins" pitchFamily="2" charset="77"/>
-              </a:rPr>
-              <a:t>xx</a:t>
+              <a:t>{{de}}</a:t>
             </a:r>
             <a:endParaRPr lang="pt-BR" sz="1400" b="1" dirty="0">
               <a:solidFill>
